--- a/08-AI_CAMPUS-main/python-day4/Python_Day4.pptx
+++ b/08-AI_CAMPUS-main/python-day4/Python_Day4.pptx
@@ -3331,7 +3331,7 @@
                 <a:ea typeface="Malgun Gothic" pitchFamily="34" charset="-122"/>
                 <a:cs typeface="Malgun Gothic" pitchFamily="34" charset="-120"/>
               </a:rPr>
-              <a:t>강사: 박웅근 · 김정인</a:t>
+              <a:t>강사: 이몽룡 · 홍길동</a:t>
             </a:r>
             <a:endParaRPr lang="en-US" sz="1300" dirty="0"/>
           </a:p>
@@ -3772,7 +3772,7 @@
                 <a:latin typeface="Malgun Gothic" pitchFamily="34" charset="0"/>
                 <a:ea typeface="Malgun Gothic" pitchFamily="34" charset="-122"/>
                 <a:cs typeface="Malgun Gothic" pitchFamily="34" charset="-120"/>
-                <a:hlinkClick r:id="rId3" tooltip="https://imguru-mooc.github.io/AI_CAMPUS/python-day4/anim/D4-1_NumPy_%EB%B8%8C%EB%A1%9C%EB%93%9C%EC%BA%90%EC%8A%A4%ED%8C%85_%EB%A7%88%EC%8A%A4%ED%81%AC.html">
+                <a:hlinkClick r:id="rId3" tooltip="https://devops0906.github.io/AI_CAMPUS/python-day4/anim/D4-1_NumPy_%EB%B8%8C%EB%A1%9C%EB%93%9C%EC%BA%90%EC%8A%A4%ED%8C%85_%EB%A7%88%EC%8A%A4%ED%81%AC.html">
                   <a:extLst>
                     <a:ext uri="{A12FA001-AC4F-418D-AE19-62706E023703}">
                       <ahyp:hlinkClr xmlns:ahyp="http://schemas.microsoft.com/office/drawing/2018/hyperlinkcolor" val="tx"/>
@@ -6242,7 +6242,7 @@
                 <a:latin typeface="Malgun Gothic" pitchFamily="34" charset="0"/>
                 <a:ea typeface="Malgun Gothic" pitchFamily="34" charset="-122"/>
                 <a:cs typeface="Malgun Gothic" pitchFamily="34" charset="-120"/>
-                <a:hlinkClick r:id="rId3" tooltip="https://imguru-mooc.github.io/AI_CAMPUS/python-day4/anim/index.html">
+                <a:hlinkClick r:id="rId3" tooltip="https://devops0906.github.io/AI_CAMPUS/python-day4/anim/index.html">
                   <a:extLst>
                     <a:ext uri="{A12FA001-AC4F-418D-AE19-62706E023703}">
                       <ahyp:hlinkClr xmlns:ahyp="http://schemas.microsoft.com/office/drawing/2018/hyperlinkcolor" val="tx"/>
@@ -8712,7 +8712,7 @@
                 <a:latin typeface="Malgun Gothic" pitchFamily="34" charset="0"/>
                 <a:ea typeface="Malgun Gothic" pitchFamily="34" charset="-122"/>
                 <a:cs typeface="Malgun Gothic" pitchFamily="34" charset="-120"/>
-                <a:hlinkClick r:id="rId3" tooltip="https://imguru-mooc.github.io/AI_CAMPUS/python-day4/anim/D4-2_DataFrame_groupby_%ED%9D%90%EB%A6%84.html">
+                <a:hlinkClick r:id="rId3" tooltip="https://devops0906.github.io/AI_CAMPUS/python-day4/anim/D4-2_DataFrame_groupby_%ED%9D%90%EB%A6%84.html">
                   <a:extLst>
                     <a:ext uri="{A12FA001-AC4F-418D-AE19-62706E023703}">
                       <ahyp:hlinkClr xmlns:ahyp="http://schemas.microsoft.com/office/drawing/2018/hyperlinkcolor" val="tx"/>
@@ -11182,7 +11182,7 @@
                 <a:latin typeface="Malgun Gothic" pitchFamily="34" charset="0"/>
                 <a:ea typeface="Malgun Gothic" pitchFamily="34" charset="-122"/>
                 <a:cs typeface="Malgun Gothic" pitchFamily="34" charset="-120"/>
-                <a:hlinkClick r:id="rId3" tooltip="https://imguru-mooc.github.io/AI_CAMPUS/python-day4/anim/index.html">
+                <a:hlinkClick r:id="rId3" tooltip="https://devops0906.github.io/AI_CAMPUS/python-day4/anim/index.html">
                   <a:extLst>
                     <a:ext uri="{A12FA001-AC4F-418D-AE19-62706E023703}">
                       <ahyp:hlinkClr xmlns:ahyp="http://schemas.microsoft.com/office/drawing/2018/hyperlinkcolor" val="tx"/>
@@ -25734,7 +25734,7 @@
       <p:sp>
         <p:nvSpPr>
           <p:cNvPr id="7" name="Text 4">
-            <a:hlinkClick r:id="rId3" tooltip="https://imguru-mooc.github.io/AI_CAMPUS/python-day4/anim/index.html"/>
+            <a:hlinkClick r:id="rId3" tooltip="https://devops0906.github.io/AI_CAMPUS/python-day4/anim/index.html"/>
           </p:cNvPr>
           <p:cNvSpPr txBox="1"/>
           <p:nvPr/>
@@ -25765,7 +25765,7 @@
                 <a:latin typeface="Courier New" pitchFamily="34" charset="0"/>
                 <a:ea typeface="Courier New" pitchFamily="34" charset="-122"/>
                 <a:cs typeface="Courier New" pitchFamily="34" charset="-120"/>
-                <a:hlinkClick r:id="rId3" tooltip="https://imguru-mooc.github.io/AI_CAMPUS/python-day4/anim/index.html">
+                <a:hlinkClick r:id="rId3" tooltip="https://devops0906.github.io/AI_CAMPUS/python-day4/anim/index.html">
                   <a:extLst>
                     <a:ext uri="{A12FA001-AC4F-418D-AE19-62706E023703}">
                       <ahyp:hlinkClr xmlns:ahyp="http://schemas.microsoft.com/office/drawing/2018/hyperlinkcolor" val="tx"/>
@@ -26179,7 +26179,7 @@
       <p:sp>
         <p:nvSpPr>
           <p:cNvPr id="15" name="Text 12">
-            <a:hlinkClick r:id="rId4" tooltip="https://imguru-mooc.github.io/AI_CAMPUS/python-day4/anim/worksheet.html"/>
+            <a:hlinkClick r:id="rId4" tooltip="https://devops0906.github.io/AI_CAMPUS/python-day4/anim/worksheet.html"/>
           </p:cNvPr>
           <p:cNvSpPr txBox="1"/>
           <p:nvPr/>
@@ -26210,7 +26210,7 @@
                 <a:latin typeface="Courier New" pitchFamily="34" charset="0"/>
                 <a:ea typeface="Courier New" pitchFamily="34" charset="-122"/>
                 <a:cs typeface="Courier New" pitchFamily="34" charset="-120"/>
-                <a:hlinkClick r:id="rId4" tooltip="https://imguru-mooc.github.io/AI_CAMPUS/python-day4/anim/worksheet.html">
+                <a:hlinkClick r:id="rId4" tooltip="https://devops0906.github.io/AI_CAMPUS/python-day4/anim/worksheet.html">
                   <a:extLst>
                     <a:ext uri="{A12FA001-AC4F-418D-AE19-62706E023703}">
                       <ahyp:hlinkClr xmlns:ahyp="http://schemas.microsoft.com/office/drawing/2018/hyperlinkcolor" val="tx"/>
@@ -26995,7 +26995,7 @@
       <p:sp>
         <p:nvSpPr>
           <p:cNvPr id="7" name="Text 4">
-            <a:hlinkClick r:id="rId3" tooltip="https://imguru-mooc.github.io/AI_CAMPUS/python-day4/anim/D4-1_NumPy_%EB%B8%8C%EB%A1%9C%EB%93%9C%EC%BA%90%EC%8A%A4%ED%8C%85_%EB%A7%88%EC%8A%A4%ED%81%AC.html"/>
+            <a:hlinkClick r:id="rId3" tooltip="https://devops0906.github.io/AI_CAMPUS/python-day4/anim/D4-1_NumPy_%EB%B8%8C%EB%A1%9C%EB%93%9C%EC%BA%90%EC%8A%A4%ED%8C%85_%EB%A7%88%EC%8A%A4%ED%81%AC.html"/>
           </p:cNvPr>
           <p:cNvSpPr txBox="1"/>
           <p:nvPr/>
@@ -27026,7 +27026,7 @@
                 <a:latin typeface="Malgun Gothic" pitchFamily="34" charset="0"/>
                 <a:ea typeface="Malgun Gothic" pitchFamily="34" charset="-122"/>
                 <a:cs typeface="Malgun Gothic" pitchFamily="34" charset="-120"/>
-                <a:hlinkClick r:id="rId3" tooltip="https://imguru-mooc.github.io/AI_CAMPUS/python-day4/anim/D4-1_NumPy_%EB%B8%8C%EB%A1%9C%EB%93%9C%EC%BA%90%EC%8A%A4%ED%8C%85_%EB%A7%88%EC%8A%A4%ED%81%AC.html">
+                <a:hlinkClick r:id="rId3" tooltip="https://devops0906.github.io/AI_CAMPUS/python-day4/anim/D4-1_NumPy_%EB%B8%8C%EB%A1%9C%EB%93%9C%EC%BA%90%EC%8A%A4%ED%8C%85_%EB%A7%88%EC%8A%A4%ED%81%AC.html">
                   <a:extLst>
                     <a:ext uri="{A12FA001-AC4F-418D-AE19-62706E023703}">
                       <ahyp:hlinkClr xmlns:ahyp="http://schemas.microsoft.com/office/drawing/2018/hyperlinkcolor" val="tx"/>
@@ -27194,7 +27194,7 @@
       <p:sp>
         <p:nvSpPr>
           <p:cNvPr id="12" name="Text 9">
-            <a:hlinkClick r:id="rId4" tooltip="https://imguru-mooc.github.io/AI_CAMPUS/python-day4/anim/D4-2_DataFrame_groupby_%ED%9D%90%EB%A6%84.html"/>
+            <a:hlinkClick r:id="rId4" tooltip="https://devops0906.github.io/AI_CAMPUS/python-day4/anim/D4-2_DataFrame_groupby_%ED%9D%90%EB%A6%84.html"/>
           </p:cNvPr>
           <p:cNvSpPr txBox="1"/>
           <p:nvPr/>
@@ -27225,7 +27225,7 @@
                 <a:latin typeface="Malgun Gothic" pitchFamily="34" charset="0"/>
                 <a:ea typeface="Malgun Gothic" pitchFamily="34" charset="-122"/>
                 <a:cs typeface="Malgun Gothic" pitchFamily="34" charset="-120"/>
-                <a:hlinkClick r:id="rId4" tooltip="https://imguru-mooc.github.io/AI_CAMPUS/python-day4/anim/D4-2_DataFrame_groupby_%ED%9D%90%EB%A6%84.html">
+                <a:hlinkClick r:id="rId4" tooltip="https://devops0906.github.io/AI_CAMPUS/python-day4/anim/D4-2_DataFrame_groupby_%ED%9D%90%EB%A6%84.html">
                   <a:extLst>
                     <a:ext uri="{A12FA001-AC4F-418D-AE19-62706E023703}">
                       <ahyp:hlinkClr xmlns:ahyp="http://schemas.microsoft.com/office/drawing/2018/hyperlinkcolor" val="tx"/>
@@ -27393,7 +27393,7 @@
       <p:sp>
         <p:nvSpPr>
           <p:cNvPr id="17" name="Text 14">
-            <a:hlinkClick r:id="rId5" tooltip="https://imguru-mooc.github.io/AI_CAMPUS/python-day3/anim/D3-5_%EC%8B%9C%EB%A6%AC%EC%96%BC_%EC%8A%A4%ED%8A%B8%EB%A6%BC.html"/>
+            <a:hlinkClick r:id="rId5" tooltip="https://devops0906.github.io/AI_CAMPUS/python-day3/anim/D3-5_%EC%8B%9C%EB%A6%AC%EC%96%BC_%EC%8A%A4%ED%8A%B8%EB%A6%BC.html"/>
           </p:cNvPr>
           <p:cNvSpPr txBox="1"/>
           <p:nvPr/>
@@ -27424,7 +27424,7 @@
                 <a:latin typeface="Malgun Gothic" pitchFamily="34" charset="0"/>
                 <a:ea typeface="Malgun Gothic" pitchFamily="34" charset="-122"/>
                 <a:cs typeface="Malgun Gothic" pitchFamily="34" charset="-120"/>
-                <a:hlinkClick r:id="rId5" tooltip="https://imguru-mooc.github.io/AI_CAMPUS/python-day3/anim/D3-5_%EC%8B%9C%EB%A6%AC%EC%96%BC_%EC%8A%A4%ED%8A%B8%EB%A6%BC.html">
+                <a:hlinkClick r:id="rId5" tooltip="https://devops0906.github.io/AI_CAMPUS/python-day3/anim/D3-5_%EC%8B%9C%EB%A6%AC%EC%96%BC_%EC%8A%A4%ED%8A%B8%EB%A6%BC.html">
                   <a:extLst>
                     <a:ext uri="{A12FA001-AC4F-418D-AE19-62706E023703}">
                       <ahyp:hlinkClr xmlns:ahyp="http://schemas.microsoft.com/office/drawing/2018/hyperlinkcolor" val="tx"/>
@@ -27592,7 +27592,7 @@
       <p:sp>
         <p:nvSpPr>
           <p:cNvPr id="22" name="Text 19">
-            <a:hlinkClick r:id="rId6" tooltip="https://imguru-mooc.github.io/AI_CAMPUS/python-day3/anim/D3-4_JSON_%EC%A7%81%EB%A0%AC%ED%99%94_%EC%99%95%EB%B3%B5.html"/>
+            <a:hlinkClick r:id="rId6" tooltip="https://devops0906.github.io/AI_CAMPUS/python-day3/anim/D3-4_JSON_%EC%A7%81%EB%A0%AC%ED%99%94_%EC%99%95%EB%B3%B5.html"/>
           </p:cNvPr>
           <p:cNvSpPr txBox="1"/>
           <p:nvPr/>
@@ -27623,7 +27623,7 @@
                 <a:latin typeface="Malgun Gothic" pitchFamily="34" charset="0"/>
                 <a:ea typeface="Malgun Gothic" pitchFamily="34" charset="-122"/>
                 <a:cs typeface="Malgun Gothic" pitchFamily="34" charset="-120"/>
-                <a:hlinkClick r:id="rId6" tooltip="https://imguru-mooc.github.io/AI_CAMPUS/python-day3/anim/D3-4_JSON_%EC%A7%81%EB%A0%AC%ED%99%94_%EC%99%95%EB%B3%B5.html">
+                <a:hlinkClick r:id="rId6" tooltip="https://devops0906.github.io/AI_CAMPUS/python-day3/anim/D3-4_JSON_%EC%A7%81%EB%A0%AC%ED%99%94_%EC%99%95%EB%B3%B5.html">
                   <a:extLst>
                     <a:ext uri="{A12FA001-AC4F-418D-AE19-62706E023703}">
                       <ahyp:hlinkClr xmlns:ahyp="http://schemas.microsoft.com/office/drawing/2018/hyperlinkcolor" val="tx"/>
@@ -27791,7 +27791,7 @@
       <p:sp>
         <p:nvSpPr>
           <p:cNvPr id="27" name="Text 24">
-            <a:hlinkClick r:id="rId7" tooltip="https://imguru-mooc.github.io/AI_CAMPUS/python-day2/anim/D2-5_%EC%A4%91%EC%B2%A9%EC%9E%90%EB%A3%8C%EA%B5%AC%EC%A1%B0_%ED%8A%B8%EB%A6%AC%EB%B7%B0%EC%96%B4.html"/>
+            <a:hlinkClick r:id="rId7" tooltip="https://devops0906.github.io/AI_CAMPUS/python-day2/anim/D2-5_%EC%A4%91%EC%B2%A9%EC%9E%90%EB%A3%8C%EA%B5%AC%EC%A1%B0_%ED%8A%B8%EB%A6%AC%EB%B7%B0%EC%96%B4.html"/>
           </p:cNvPr>
           <p:cNvSpPr txBox="1"/>
           <p:nvPr/>
@@ -27822,7 +27822,7 @@
                 <a:latin typeface="Malgun Gothic" pitchFamily="34" charset="0"/>
                 <a:ea typeface="Malgun Gothic" pitchFamily="34" charset="-122"/>
                 <a:cs typeface="Malgun Gothic" pitchFamily="34" charset="-120"/>
-                <a:hlinkClick r:id="rId7" tooltip="https://imguru-mooc.github.io/AI_CAMPUS/python-day2/anim/D2-5_%EC%A4%91%EC%B2%A9%EC%9E%90%EB%A3%8C%EA%B5%AC%EC%A1%B0_%ED%8A%B8%EB%A6%AC%EB%B7%B0%EC%96%B4.html">
+                <a:hlinkClick r:id="rId7" tooltip="https://devops0906.github.io/AI_CAMPUS/python-day2/anim/D2-5_%EC%A4%91%EC%B2%A9%EC%9E%90%EB%A3%8C%EA%B5%AC%EC%A1%B0_%ED%8A%B8%EB%A6%AC%EB%B7%B0%EC%96%B4.html">
                   <a:extLst>
                     <a:ext uri="{A12FA001-AC4F-418D-AE19-62706E023703}">
                       <ahyp:hlinkClr xmlns:ahyp="http://schemas.microsoft.com/office/drawing/2018/hyperlinkcolor" val="tx"/>
@@ -27990,7 +27990,7 @@
       <p:sp>
         <p:nvSpPr>
           <p:cNvPr id="32" name="Text 29">
-            <a:hlinkClick r:id="rId8" tooltip="https://imguru-mooc.github.io/AI_CAMPUS/python-day1/anim/04_%EB%AC%B8%EC%9E%90%EC%97%B4_%ED%8C%8C%EC%8B%B1_%ED%8C%8C%EC%9D%B4%ED%94%84%EB%9D%BC%EC%9D%B8.html"/>
+            <a:hlinkClick r:id="rId8" tooltip="https://devops0906.github.io/AI_CAMPUS/python-day1/anim/04_%EB%AC%B8%EC%9E%90%EC%97%B4_%ED%8C%8C%EC%8B%B1_%ED%8C%8C%EC%9D%B4%ED%94%84%EB%9D%BC%EC%9D%B8.html"/>
           </p:cNvPr>
           <p:cNvSpPr txBox="1"/>
           <p:nvPr/>
@@ -28021,7 +28021,7 @@
                 <a:latin typeface="Malgun Gothic" pitchFamily="34" charset="0"/>
                 <a:ea typeface="Malgun Gothic" pitchFamily="34" charset="-122"/>
                 <a:cs typeface="Malgun Gothic" pitchFamily="34" charset="-120"/>
-                <a:hlinkClick r:id="rId8" tooltip="https://imguru-mooc.github.io/AI_CAMPUS/python-day1/anim/04_%EB%AC%B8%EC%9E%90%EC%97%B4_%ED%8C%8C%EC%8B%B1_%ED%8C%8C%EC%9D%B4%ED%94%84%EB%9D%BC%EC%9D%B8.html">
+                <a:hlinkClick r:id="rId8" tooltip="https://devops0906.github.io/AI_CAMPUS/python-day1/anim/04_%EB%AC%B8%EC%9E%90%EC%97%B4_%ED%8C%8C%EC%8B%B1_%ED%8C%8C%EC%9D%B4%ED%94%84%EB%9D%BC%EC%9D%B8.html">
                   <a:extLst>
                     <a:ext uri="{A12FA001-AC4F-418D-AE19-62706E023703}">
                       <ahyp:hlinkClr xmlns:ahyp="http://schemas.microsoft.com/office/drawing/2018/hyperlinkcolor" val="tx"/>
@@ -28189,7 +28189,7 @@
       <p:sp>
         <p:nvSpPr>
           <p:cNvPr id="37" name="Text 34">
-            <a:hlinkClick r:id="rId9" tooltip="https://imguru-mooc.github.io/AI_CAMPUS/python-day1/anim/01_%EB%B9%84%ED%8A%B8%EB%A7%88%EC%8A%A4%ED%81%AC_%EC%8B%9C%EB%AE%AC%EB%A0%88%EC%9D%B4%ED%84%B0.html"/>
+            <a:hlinkClick r:id="rId9" tooltip="https://devops0906.github.io/AI_CAMPUS/python-day1/anim/01_%EB%B9%84%ED%8A%B8%EB%A7%88%EC%8A%A4%ED%81%AC_%EC%8B%9C%EB%AE%AC%EB%A0%88%EC%9D%B4%ED%84%B0.html"/>
           </p:cNvPr>
           <p:cNvSpPr txBox="1"/>
           <p:nvPr/>
@@ -28220,7 +28220,7 @@
                 <a:latin typeface="Malgun Gothic" pitchFamily="34" charset="0"/>
                 <a:ea typeface="Malgun Gothic" pitchFamily="34" charset="-122"/>
                 <a:cs typeface="Malgun Gothic" pitchFamily="34" charset="-120"/>
-                <a:hlinkClick r:id="rId9" tooltip="https://imguru-mooc.github.io/AI_CAMPUS/python-day1/anim/01_%EB%B9%84%ED%8A%B8%EB%A7%88%EC%8A%A4%ED%81%AC_%EC%8B%9C%EB%AE%AC%EB%A0%88%EC%9D%B4%ED%84%B0.html">
+                <a:hlinkClick r:id="rId9" tooltip="https://devops0906.github.io/AI_CAMPUS/python-day1/anim/01_%EB%B9%84%ED%8A%B8%EB%A7%88%EC%8A%A4%ED%81%AC_%EC%8B%9C%EB%AE%AC%EB%A0%88%EC%9D%B4%ED%84%B0.html">
                   <a:extLst>
                     <a:ext uri="{A12FA001-AC4F-418D-AE19-62706E023703}">
                       <ahyp:hlinkClr xmlns:ahyp="http://schemas.microsoft.com/office/drawing/2018/hyperlinkcolor" val="tx"/>
@@ -28363,7 +28363,7 @@
                   </a:extLst>
                 </a:hlinkClick>
               </a:rPr>
-              <a:t>https://imguru-mooc.github.io/AI_CAMPUS/python-day4/anim/index.html</a:t>
+              <a:t>https://devops0906.github.io/AI_CAMPUS/python-day4/anim/index.html</a:t>
             </a:r>
             <a:endParaRPr lang="en-US" sz="1050" dirty="0"/>
           </a:p>
@@ -29746,7 +29746,7 @@
                   </a:extLst>
                 </a:hlinkClick>
               </a:rPr>
-              <a:t>https://imguru-mooc.github.io/AI_CAMPUS/python-day4/anim/worksheet.html</a:t>
+              <a:t>https://devops0906.github.io/AI_CAMPUS/python-day4/anim/worksheet.html</a:t>
             </a:r>
             <a:endParaRPr lang="en-US" sz="900" dirty="0"/>
           </a:p>
@@ -30127,7 +30127,7 @@
                 <a:ea typeface="Malgun Gothic" pitchFamily="34" charset="-122"/>
                 <a:cs typeface="Malgun Gothic" pitchFamily="34" charset="-120"/>
               </a:rPr>
-              <a:t>온라인 자료 링크</a:t>
+              <a:t>레포 위치 링크</a:t>
             </a:r>
             <a:endParaRPr lang="en-US" sz="3000" dirty="0"/>
           </a:p>
@@ -30287,7 +30287,7 @@
                   </a:extLst>
                 </a:hlinkClick>
               </a:rPr>
-              <a:t>https://imguru-mooc.github.io/AI_CAMPUS/python-day4/anim/</a:t>
+              <a:t>https://devops0906.github.io/AI_CAMPUS/python-day4/anim/</a:t>
             </a:r>
             <a:endParaRPr lang="en-US" sz="2000" dirty="0"/>
           </a:p>
@@ -31370,7 +31370,7 @@
                 <a:latin typeface="Malgun Gothic" pitchFamily="34" charset="0"/>
                 <a:ea typeface="Malgun Gothic" pitchFamily="34" charset="-122"/>
                 <a:cs typeface="Malgun Gothic" pitchFamily="34" charset="-120"/>
-                <a:hlinkClick r:id="rId3" tooltip="https://imguru-mooc.github.io/AI_CAMPUS/python-day4/anim/D4-1_NumPy_%EB%B8%8C%EB%A1%9C%EB%93%9C%EC%BA%90%EC%8A%A4%ED%8C%85_%EB%A7%88%EC%8A%A4%ED%81%AC.html">
+                <a:hlinkClick r:id="rId3" tooltip="https://devops0906.github.io/AI_CAMPUS/python-day4/anim/D4-1_NumPy_%EB%B8%8C%EB%A1%9C%EB%93%9C%EC%BA%90%EC%8A%A4%ED%8C%85_%EB%A7%88%EC%8A%A4%ED%81%AC.html">
                   <a:extLst>
                     <a:ext uri="{A12FA001-AC4F-418D-AE19-62706E023703}">
                       <ahyp:hlinkClr xmlns:ahyp="http://schemas.microsoft.com/office/drawing/2018/hyperlinkcolor" val="tx"/>
